--- a/assets/figures-editable/c1-c2/c1-e08.pptx
+++ b/assets/figures-editable/c1-c2/c1-e08.pptx
@@ -7,7 +7,7 @@
   <p:sldIdLst>
     <p:sldId id="256" r:id="rId7"/>
   </p:sldIdLst>
-  <p:sldSz cx="11948160" cy="7924799" type="screen4x3"/>
+  <p:sldSz cx="12191695" cy="6858000" type="screen4x3"/>
   <p:notesSz cx="6858000" cy="9144000"/>
   <p:defaultTextStyle>
     <a:defPPr>
@@ -3098,14 +3098,14 @@
       <p:grpSpPr/>
       <p:sp>
         <p:nvSpPr>
-          <p:cNvPr id="2" name="text1" descr="sci-ppt:C1-E08-001"/>
+          <p:cNvPr id="2" name="C1-E08 text 0" descr="sci-ppt:o000"/>
           <p:cNvSpPr txBox="1"/>
           <p:nvPr/>
         </p:nvSpPr>
         <p:spPr>
           <a:xfrm>
-            <a:off x="316992" y="268224"/>
-            <a:ext cx="11277600" cy="359054"/>
+            <a:off x="274320" y="118872"/>
+            <a:ext cx="11612880" cy="340105"/>
           </a:xfrm>
           <a:prstGeom prst="rect">
             <a:avLst/>
@@ -3114,7 +3114,7 @@
           <a:effectLst/>
         </p:spPr>
         <p:txBody>
-          <a:bodyPr wrap="none" lIns="27432" rIns="27432" tIns="18288" bIns="18288" anchor="ctr">
+          <a:bodyPr wrap="none" lIns="18288" rIns="18288" tIns="18288" bIns="18288" anchor="t">
             <a:spAutoFit/>
           </a:bodyPr>
           <a:lstStyle/>
@@ -3125,59 +3125,115 @@
               </a:spcAft>
             </a:pPr>
             <a:r>
-              <a:rPr sz="1823" b="0" i="0">
+              <a:rPr sz="1900" b="1" i="0">
                 <a:solidFill>
                   <a:srgbClr val="8EDBD4"/>
                 </a:solidFill>
                 <a:latin typeface="Arial"/>
               </a:rPr>
-              <a:t>C1-E08 | Physical-variable diagram</a:t>
-            </a:r>
-          </a:p>
-        </p:txBody>
-      </p:sp>
-      <p:sp>
-        <p:nvSpPr>
-          <p:cNvPr id="3" name="ellipse2" descr="sci-ppt:C1-E08-002"/>
-          <p:cNvSpPr/>
-          <p:nvPr/>
-        </p:nvSpPr>
-        <p:spPr>
-          <a:xfrm>
-            <a:off x="2072640" y="1402080"/>
-            <a:ext cx="2438400" cy="2438400"/>
-          </a:xfrm>
-          <a:prstGeom prst="ellipse">
-            <a:avLst/>
-          </a:prstGeom>
-          <a:solidFill>
-            <a:srgbClr val="213E4B"/>
-          </a:solidFill>
-          <a:ln w="21590">
+              <a:t>C1-E08 · Pressure composition requiring thermodynamic closure</a:t>
+            </a:r>
+          </a:p>
+        </p:txBody>
+      </p:sp>
+      <p:cxnSp>
+        <p:nvCxnSpPr>
+          <p:cNvPr id="3" name="C1-E08 line 1" descr="sci-ppt:o001"/>
+          <p:cNvCxnSpPr/>
+          <p:nvPr/>
+        </p:nvCxnSpPr>
+        <p:spPr>
+          <a:xfrm>
+            <a:off x="5486400" y="5029200"/>
+            <a:ext cx="6217920" cy="0"/>
+          </a:xfrm>
+          <a:prstGeom prst="line">
+            <a:avLst/>
+          </a:prstGeom>
+          <a:ln w="19050">
             <a:solidFill>
               <a:srgbClr val="B4C7D2"/>
             </a:solidFill>
           </a:ln>
           <a:effectLst/>
         </p:spPr>
-        <p:txBody>
-          <a:bodyPr rtlCol="0" anchor="ctr"/>
-          <a:lstStyle/>
-          <a:p>
-            <a:pPr algn="ctr"/>
-          </a:p>
-        </p:txBody>
-      </p:sp>
-      <p:sp>
-        <p:nvSpPr>
-          <p:cNvPr id="4" name="text3" descr="sci-ppt:C1-E08-003"/>
+      </p:cxnSp>
+      <p:cxnSp>
+        <p:nvCxnSpPr>
+          <p:cNvPr id="4" name="C1-E08 line 2" descr="sci-ppt:o002"/>
+          <p:cNvCxnSpPr/>
+          <p:nvPr/>
+        </p:nvCxnSpPr>
+        <p:spPr>
+          <a:xfrm>
+            <a:off x="5486400" y="1371600"/>
+            <a:ext cx="0" cy="3657600"/>
+          </a:xfrm>
+          <a:prstGeom prst="line">
+            <a:avLst/>
+          </a:prstGeom>
+          <a:ln w="19050">
+            <a:solidFill>
+              <a:srgbClr val="B4C7D2"/>
+            </a:solidFill>
+          </a:ln>
+          <a:effectLst/>
+        </p:spPr>
+      </p:cxnSp>
+      <p:cxnSp>
+        <p:nvCxnSpPr>
+          <p:cNvPr id="5" name="C1-E08 line 3" descr="sci-ppt:o003"/>
+          <p:cNvCxnSpPr/>
+          <p:nvPr/>
+        </p:nvCxnSpPr>
+        <p:spPr>
+          <a:xfrm>
+            <a:off x="5422392" y="5029200"/>
+            <a:ext cx="64008" cy="0"/>
+          </a:xfrm>
+          <a:prstGeom prst="line">
+            <a:avLst/>
+          </a:prstGeom>
+          <a:ln w="12700">
+            <a:solidFill>
+              <a:srgbClr val="B4C7D2"/>
+            </a:solidFill>
+          </a:ln>
+          <a:effectLst/>
+        </p:spPr>
+      </p:cxnSp>
+      <p:cxnSp>
+        <p:nvCxnSpPr>
+          <p:cNvPr id="6" name="C1-E08 line 4" descr="sci-ppt:o004"/>
+          <p:cNvCxnSpPr/>
+          <p:nvPr/>
+        </p:nvCxnSpPr>
+        <p:spPr>
+          <a:xfrm>
+            <a:off x="5486400" y="5029200"/>
+            <a:ext cx="6217920" cy="0"/>
+          </a:xfrm>
+          <a:prstGeom prst="line">
+            <a:avLst/>
+          </a:prstGeom>
+          <a:ln w="7620">
+            <a:solidFill>
+              <a:srgbClr val="2E4756"/>
+            </a:solidFill>
+          </a:ln>
+          <a:effectLst/>
+        </p:spPr>
+      </p:cxnSp>
+      <p:sp>
+        <p:nvSpPr>
+          <p:cNvPr id="7" name="C1-E08 text 5" descr="sci-ppt:o005"/>
           <p:cNvSpPr txBox="1"/>
           <p:nvPr/>
         </p:nvSpPr>
         <p:spPr>
           <a:xfrm>
-            <a:off x="2072640" y="2316480"/>
-            <a:ext cx="4267200" cy="340156"/>
+            <a:off x="4617720" y="4946904"/>
+            <a:ext cx="777240" cy="208407"/>
           </a:xfrm>
           <a:prstGeom prst="rect">
             <a:avLst/>
@@ -3186,7 +3242,383 @@
           <a:effectLst/>
         </p:spPr>
         <p:txBody>
-          <a:bodyPr wrap="none" lIns="27432" rIns="27432" tIns="18288" bIns="18288" anchor="ctr">
+          <a:bodyPr wrap="none" lIns="18288" rIns="18288" tIns="18288" bIns="18288" anchor="t">
+            <a:spAutoFit/>
+          </a:bodyPr>
+          <a:lstStyle/>
+          <a:p>
+            <a:pPr algn="r">
+              <a:spcAft>
+                <a:spcPts val="0"/>
+              </a:spcAft>
+            </a:pPr>
+            <a:r>
+              <a:rPr sz="1050" b="0" i="0">
+                <a:solidFill>
+                  <a:srgbClr val="B4C7D2"/>
+                </a:solidFill>
+                <a:latin typeface="Arial"/>
+              </a:rPr>
+              <a:t>0</a:t>
+            </a:r>
+          </a:p>
+        </p:txBody>
+      </p:sp>
+      <p:cxnSp>
+        <p:nvCxnSpPr>
+          <p:cNvPr id="8" name="C1-E08 line 6" descr="sci-ppt:o006"/>
+          <p:cNvCxnSpPr/>
+          <p:nvPr/>
+        </p:nvCxnSpPr>
+        <p:spPr>
+          <a:xfrm>
+            <a:off x="5422392" y="4158342"/>
+            <a:ext cx="64008" cy="0"/>
+          </a:xfrm>
+          <a:prstGeom prst="line">
+            <a:avLst/>
+          </a:prstGeom>
+          <a:ln w="12700">
+            <a:solidFill>
+              <a:srgbClr val="B4C7D2"/>
+            </a:solidFill>
+          </a:ln>
+          <a:effectLst/>
+        </p:spPr>
+      </p:cxnSp>
+      <p:cxnSp>
+        <p:nvCxnSpPr>
+          <p:cNvPr id="9" name="C1-E08 line 7" descr="sci-ppt:o007"/>
+          <p:cNvCxnSpPr/>
+          <p:nvPr/>
+        </p:nvCxnSpPr>
+        <p:spPr>
+          <a:xfrm>
+            <a:off x="5486400" y="4158342"/>
+            <a:ext cx="6217920" cy="0"/>
+          </a:xfrm>
+          <a:prstGeom prst="line">
+            <a:avLst/>
+          </a:prstGeom>
+          <a:ln w="7620">
+            <a:solidFill>
+              <a:srgbClr val="2E4756"/>
+            </a:solidFill>
+          </a:ln>
+          <a:effectLst/>
+        </p:spPr>
+      </p:cxnSp>
+      <p:sp>
+        <p:nvSpPr>
+          <p:cNvPr id="10" name="C1-E08 text 8" descr="sci-ppt:o008"/>
+          <p:cNvSpPr txBox="1"/>
+          <p:nvPr/>
+        </p:nvSpPr>
+        <p:spPr>
+          <a:xfrm>
+            <a:off x="4617720" y="4076046"/>
+            <a:ext cx="777240" cy="208407"/>
+          </a:xfrm>
+          <a:prstGeom prst="rect">
+            <a:avLst/>
+          </a:prstGeom>
+          <a:noFill/>
+          <a:effectLst/>
+        </p:spPr>
+        <p:txBody>
+          <a:bodyPr wrap="none" lIns="18288" rIns="18288" tIns="18288" bIns="18288" anchor="t">
+            <a:spAutoFit/>
+          </a:bodyPr>
+          <a:lstStyle/>
+          <a:p>
+            <a:pPr algn="r">
+              <a:spcAft>
+                <a:spcPts val="0"/>
+              </a:spcAft>
+            </a:pPr>
+            <a:r>
+              <a:rPr sz="1050" b="0" i="0">
+                <a:solidFill>
+                  <a:srgbClr val="B4C7D2"/>
+                </a:solidFill>
+                <a:latin typeface="Arial"/>
+              </a:rPr>
+              <a:t>1</a:t>
+            </a:r>
+          </a:p>
+        </p:txBody>
+      </p:sp>
+      <p:cxnSp>
+        <p:nvCxnSpPr>
+          <p:cNvPr id="11" name="C1-E08 line 9" descr="sci-ppt:o009"/>
+          <p:cNvCxnSpPr/>
+          <p:nvPr/>
+        </p:nvCxnSpPr>
+        <p:spPr>
+          <a:xfrm>
+            <a:off x="5422392" y="3287485"/>
+            <a:ext cx="64008" cy="0"/>
+          </a:xfrm>
+          <a:prstGeom prst="line">
+            <a:avLst/>
+          </a:prstGeom>
+          <a:ln w="12700">
+            <a:solidFill>
+              <a:srgbClr val="B4C7D2"/>
+            </a:solidFill>
+          </a:ln>
+          <a:effectLst/>
+        </p:spPr>
+      </p:cxnSp>
+      <p:cxnSp>
+        <p:nvCxnSpPr>
+          <p:cNvPr id="12" name="C1-E08 line 10" descr="sci-ppt:o010"/>
+          <p:cNvCxnSpPr/>
+          <p:nvPr/>
+        </p:nvCxnSpPr>
+        <p:spPr>
+          <a:xfrm>
+            <a:off x="5486400" y="3287485"/>
+            <a:ext cx="6217920" cy="0"/>
+          </a:xfrm>
+          <a:prstGeom prst="line">
+            <a:avLst/>
+          </a:prstGeom>
+          <a:ln w="7620">
+            <a:solidFill>
+              <a:srgbClr val="2E4756"/>
+            </a:solidFill>
+          </a:ln>
+          <a:effectLst/>
+        </p:spPr>
+      </p:cxnSp>
+      <p:sp>
+        <p:nvSpPr>
+          <p:cNvPr id="13" name="C1-E08 text 11" descr="sci-ppt:o011"/>
+          <p:cNvSpPr txBox="1"/>
+          <p:nvPr/>
+        </p:nvSpPr>
+        <p:spPr>
+          <a:xfrm>
+            <a:off x="4617720" y="3205189"/>
+            <a:ext cx="777240" cy="208407"/>
+          </a:xfrm>
+          <a:prstGeom prst="rect">
+            <a:avLst/>
+          </a:prstGeom>
+          <a:noFill/>
+          <a:effectLst/>
+        </p:spPr>
+        <p:txBody>
+          <a:bodyPr wrap="none" lIns="18288" rIns="18288" tIns="18288" bIns="18288" anchor="t">
+            <a:spAutoFit/>
+          </a:bodyPr>
+          <a:lstStyle/>
+          <a:p>
+            <a:pPr algn="r">
+              <a:spcAft>
+                <a:spcPts val="0"/>
+              </a:spcAft>
+            </a:pPr>
+            <a:r>
+              <a:rPr sz="1050" b="0" i="0">
+                <a:solidFill>
+                  <a:srgbClr val="B4C7D2"/>
+                </a:solidFill>
+                <a:latin typeface="Arial"/>
+              </a:rPr>
+              <a:t>2</a:t>
+            </a:r>
+          </a:p>
+        </p:txBody>
+      </p:sp>
+      <p:cxnSp>
+        <p:nvCxnSpPr>
+          <p:cNvPr id="14" name="C1-E08 line 12" descr="sci-ppt:o012"/>
+          <p:cNvCxnSpPr/>
+          <p:nvPr/>
+        </p:nvCxnSpPr>
+        <p:spPr>
+          <a:xfrm>
+            <a:off x="5422392" y="2416628"/>
+            <a:ext cx="64008" cy="0"/>
+          </a:xfrm>
+          <a:prstGeom prst="line">
+            <a:avLst/>
+          </a:prstGeom>
+          <a:ln w="12700">
+            <a:solidFill>
+              <a:srgbClr val="B4C7D2"/>
+            </a:solidFill>
+          </a:ln>
+          <a:effectLst/>
+        </p:spPr>
+      </p:cxnSp>
+      <p:cxnSp>
+        <p:nvCxnSpPr>
+          <p:cNvPr id="15" name="C1-E08 line 13" descr="sci-ppt:o013"/>
+          <p:cNvCxnSpPr/>
+          <p:nvPr/>
+        </p:nvCxnSpPr>
+        <p:spPr>
+          <a:xfrm>
+            <a:off x="5486400" y="2416628"/>
+            <a:ext cx="6217920" cy="0"/>
+          </a:xfrm>
+          <a:prstGeom prst="line">
+            <a:avLst/>
+          </a:prstGeom>
+          <a:ln w="7620">
+            <a:solidFill>
+              <a:srgbClr val="2E4756"/>
+            </a:solidFill>
+          </a:ln>
+          <a:effectLst/>
+        </p:spPr>
+      </p:cxnSp>
+      <p:sp>
+        <p:nvSpPr>
+          <p:cNvPr id="16" name="C1-E08 text 14" descr="sci-ppt:o014"/>
+          <p:cNvSpPr txBox="1"/>
+          <p:nvPr/>
+        </p:nvSpPr>
+        <p:spPr>
+          <a:xfrm>
+            <a:off x="4617720" y="2334332"/>
+            <a:ext cx="777240" cy="208407"/>
+          </a:xfrm>
+          <a:prstGeom prst="rect">
+            <a:avLst/>
+          </a:prstGeom>
+          <a:noFill/>
+          <a:effectLst/>
+        </p:spPr>
+        <p:txBody>
+          <a:bodyPr wrap="none" lIns="18288" rIns="18288" tIns="18288" bIns="18288" anchor="t">
+            <a:spAutoFit/>
+          </a:bodyPr>
+          <a:lstStyle/>
+          <a:p>
+            <a:pPr algn="r">
+              <a:spcAft>
+                <a:spcPts val="0"/>
+              </a:spcAft>
+            </a:pPr>
+            <a:r>
+              <a:rPr sz="1050" b="0" i="0">
+                <a:solidFill>
+                  <a:srgbClr val="B4C7D2"/>
+                </a:solidFill>
+                <a:latin typeface="Arial"/>
+              </a:rPr>
+              <a:t>3</a:t>
+            </a:r>
+          </a:p>
+        </p:txBody>
+      </p:sp>
+      <p:cxnSp>
+        <p:nvCxnSpPr>
+          <p:cNvPr id="17" name="C1-E08 line 15" descr="sci-ppt:o015"/>
+          <p:cNvCxnSpPr/>
+          <p:nvPr/>
+        </p:nvCxnSpPr>
+        <p:spPr>
+          <a:xfrm>
+            <a:off x="5422392" y="1545771"/>
+            <a:ext cx="64008" cy="0"/>
+          </a:xfrm>
+          <a:prstGeom prst="line">
+            <a:avLst/>
+          </a:prstGeom>
+          <a:ln w="12700">
+            <a:solidFill>
+              <a:srgbClr val="B4C7D2"/>
+            </a:solidFill>
+          </a:ln>
+          <a:effectLst/>
+        </p:spPr>
+      </p:cxnSp>
+      <p:cxnSp>
+        <p:nvCxnSpPr>
+          <p:cNvPr id="18" name="C1-E08 line 16" descr="sci-ppt:o016"/>
+          <p:cNvCxnSpPr/>
+          <p:nvPr/>
+        </p:nvCxnSpPr>
+        <p:spPr>
+          <a:xfrm>
+            <a:off x="5486400" y="1545771"/>
+            <a:ext cx="6217920" cy="0"/>
+          </a:xfrm>
+          <a:prstGeom prst="line">
+            <a:avLst/>
+          </a:prstGeom>
+          <a:ln w="7620">
+            <a:solidFill>
+              <a:srgbClr val="2E4756"/>
+            </a:solidFill>
+          </a:ln>
+          <a:effectLst/>
+        </p:spPr>
+      </p:cxnSp>
+      <p:sp>
+        <p:nvSpPr>
+          <p:cNvPr id="19" name="C1-E08 text 17" descr="sci-ppt:o017"/>
+          <p:cNvSpPr txBox="1"/>
+          <p:nvPr/>
+        </p:nvSpPr>
+        <p:spPr>
+          <a:xfrm>
+            <a:off x="4617720" y="1463475"/>
+            <a:ext cx="777240" cy="208407"/>
+          </a:xfrm>
+          <a:prstGeom prst="rect">
+            <a:avLst/>
+          </a:prstGeom>
+          <a:noFill/>
+          <a:effectLst/>
+        </p:spPr>
+        <p:txBody>
+          <a:bodyPr wrap="none" lIns="18288" rIns="18288" tIns="18288" bIns="18288" anchor="t">
+            <a:spAutoFit/>
+          </a:bodyPr>
+          <a:lstStyle/>
+          <a:p>
+            <a:pPr algn="r">
+              <a:spcAft>
+                <a:spcPts val="0"/>
+              </a:spcAft>
+            </a:pPr>
+            <a:r>
+              <a:rPr sz="1050" b="0" i="0">
+                <a:solidFill>
+                  <a:srgbClr val="B4C7D2"/>
+                </a:solidFill>
+                <a:latin typeface="Arial"/>
+              </a:rPr>
+              <a:t>4</a:t>
+            </a:r>
+          </a:p>
+        </p:txBody>
+      </p:sp>
+      <p:sp>
+        <p:nvSpPr>
+          <p:cNvPr id="20" name="C1-E08 text 18" descr="sci-ppt:o018"/>
+          <p:cNvSpPr txBox="1"/>
+          <p:nvPr/>
+        </p:nvSpPr>
+        <p:spPr>
+          <a:xfrm>
+            <a:off x="4937760" y="1024128"/>
+            <a:ext cx="6217920" cy="231648"/>
+          </a:xfrm>
+          <a:prstGeom prst="rect">
+            <a:avLst/>
+          </a:prstGeom>
+          <a:noFill/>
+          <a:effectLst/>
+        </p:spPr>
+        <p:txBody>
+          <a:bodyPr wrap="none" lIns="18288" rIns="18288" tIns="18288" bIns="18288" anchor="t">
             <a:spAutoFit/>
           </a:bodyPr>
           <a:lstStyle/>
@@ -3197,27 +3629,135 @@
               </a:spcAft>
             </a:pPr>
             <a:r>
-              <a:rPr sz="1728" b="0" i="0">
+              <a:rPr sz="1200" b="0" i="0">
                 <a:solidFill>
                   <a:srgbClr val="E7F0F3"/>
                 </a:solidFill>
                 <a:latin typeface="Arial"/>
               </a:rPr>
-              <a:t>PFC vapor + water vapor</a:t>
-            </a:r>
-          </a:p>
-        </p:txBody>
-      </p:sp>
-      <p:sp>
-        <p:nvSpPr>
-          <p:cNvPr id="5" name="text4" descr="sci-ppt:C1-E08-004"/>
+              <a:t>partial pressure (bar)</a:t>
+            </a:r>
+          </a:p>
+        </p:txBody>
+      </p:sp>
+      <p:sp>
+        <p:nvSpPr>
+          <p:cNvPr id="21" name="C1-E08 rect 19" descr="sci-ppt:o019"/>
+          <p:cNvSpPr/>
+          <p:nvPr/>
+        </p:nvSpPr>
+        <p:spPr>
+          <a:xfrm>
+            <a:off x="5750661" y="4129142"/>
+            <a:ext cx="1025956" cy="900057"/>
+          </a:xfrm>
+          <a:prstGeom prst="rect">
+            <a:avLst/>
+          </a:prstGeom>
+          <a:solidFill>
+            <a:srgbClr val="8EDBD4">
+              <a:alpha val="85000"/>
+            </a:srgbClr>
+          </a:solidFill>
+          <a:ln w="12700">
+            <a:solidFill>
+              <a:srgbClr val="8EDBD4">
+                <a:alpha val="85000"/>
+              </a:srgbClr>
+            </a:solidFill>
+          </a:ln>
+          <a:effectLst/>
+        </p:spPr>
+        <p:txBody>
+          <a:bodyPr rtlCol="0" anchor="ctr"/>
+          <a:lstStyle/>
+          <a:p>
+            <a:pPr algn="ctr"/>
+          </a:p>
+        </p:txBody>
+      </p:sp>
+      <p:sp>
+        <p:nvSpPr>
+          <p:cNvPr id="22" name="C1-E08 rect 20" descr="sci-ppt:o020"/>
+          <p:cNvSpPr/>
+          <p:nvPr/>
+        </p:nvSpPr>
+        <p:spPr>
+          <a:xfrm>
+            <a:off x="5750661" y="4092502"/>
+            <a:ext cx="1025956" cy="36640"/>
+          </a:xfrm>
+          <a:prstGeom prst="rect">
+            <a:avLst/>
+          </a:prstGeom>
+          <a:solidFill>
+            <a:srgbClr val="7FC8F8">
+              <a:alpha val="85000"/>
+            </a:srgbClr>
+          </a:solidFill>
+          <a:ln w="12700">
+            <a:solidFill>
+              <a:srgbClr val="7FC8F8">
+                <a:alpha val="85000"/>
+              </a:srgbClr>
+            </a:solidFill>
+          </a:ln>
+          <a:effectLst/>
+        </p:spPr>
+        <p:txBody>
+          <a:bodyPr rtlCol="0" anchor="ctr"/>
+          <a:lstStyle/>
+          <a:p>
+            <a:pPr algn="ctr"/>
+          </a:p>
+        </p:txBody>
+      </p:sp>
+      <p:sp>
+        <p:nvSpPr>
+          <p:cNvPr id="23" name="C1-E08 rect 21" descr="sci-ppt:o021"/>
+          <p:cNvSpPr/>
+          <p:nvPr/>
+        </p:nvSpPr>
+        <p:spPr>
+          <a:xfrm>
+            <a:off x="5750661" y="4048959"/>
+            <a:ext cx="1025956" cy="43542"/>
+          </a:xfrm>
+          <a:prstGeom prst="rect">
+            <a:avLst/>
+          </a:prstGeom>
+          <a:solidFill>
+            <a:srgbClr val="F2B880">
+              <a:alpha val="85000"/>
+            </a:srgbClr>
+          </a:solidFill>
+          <a:ln w="12700">
+            <a:solidFill>
+              <a:srgbClr val="F2B880">
+                <a:alpha val="85000"/>
+              </a:srgbClr>
+            </a:solidFill>
+          </a:ln>
+          <a:effectLst/>
+        </p:spPr>
+        <p:txBody>
+          <a:bodyPr rtlCol="0" anchor="ctr"/>
+          <a:lstStyle/>
+          <a:p>
+            <a:pPr algn="ctr"/>
+          </a:p>
+        </p:txBody>
+      </p:sp>
+      <p:sp>
+        <p:nvSpPr>
+          <p:cNvPr id="24" name="C1-E08 text 22" descr="sci-ppt:o022"/>
           <p:cNvSpPr txBox="1"/>
           <p:nvPr/>
         </p:nvSpPr>
         <p:spPr>
           <a:xfrm>
-            <a:off x="2194560" y="2804160"/>
-            <a:ext cx="3779520" cy="340156"/>
+            <a:off x="5522061" y="3756351"/>
+            <a:ext cx="1483156" cy="231648"/>
           </a:xfrm>
           <a:prstGeom prst="rect">
             <a:avLst/>
@@ -3226,7 +3766,651 @@
           <a:effectLst/>
         </p:spPr>
         <p:txBody>
-          <a:bodyPr wrap="none" lIns="27432" rIns="27432" tIns="18288" bIns="18288" anchor="ctr">
+          <a:bodyPr wrap="none" lIns="18288" rIns="18288" tIns="18288" bIns="18288" anchor="t">
+            <a:spAutoFit/>
+          </a:bodyPr>
+          <a:lstStyle/>
+          <a:p>
+            <a:pPr algn="ctr">
+              <a:spcAft>
+                <a:spcPts val="0"/>
+              </a:spcAft>
+            </a:pPr>
+            <a:r>
+              <a:rPr sz="1200" b="1" i="0">
+                <a:solidFill>
+                  <a:srgbClr val="E7F0F3"/>
+                </a:solidFill>
+                <a:latin typeface="Arial"/>
+              </a:rPr>
+              <a:t>p_b = 1.13</a:t>
+            </a:r>
+          </a:p>
+        </p:txBody>
+      </p:sp>
+      <p:sp>
+        <p:nvSpPr>
+          <p:cNvPr id="25" name="C1-E08 text 23" descr="sci-ppt:o023"/>
+          <p:cNvSpPr txBox="1"/>
+          <p:nvPr/>
+        </p:nvSpPr>
+        <p:spPr>
+          <a:xfrm>
+            <a:off x="5567781" y="5111496"/>
+            <a:ext cx="1391716" cy="223900"/>
+          </a:xfrm>
+          <a:prstGeom prst="rect">
+            <a:avLst/>
+          </a:prstGeom>
+          <a:noFill/>
+          <a:effectLst/>
+        </p:spPr>
+        <p:txBody>
+          <a:bodyPr wrap="none" lIns="18288" rIns="18288" tIns="18288" bIns="18288" anchor="t">
+            <a:spAutoFit/>
+          </a:bodyPr>
+          <a:lstStyle/>
+          <a:p>
+            <a:pPr algn="ctr">
+              <a:spcAft>
+                <a:spcPts val="0"/>
+              </a:spcAft>
+            </a:pPr>
+            <a:r>
+              <a:rPr sz="1150" b="0" i="0">
+                <a:solidFill>
+                  <a:srgbClr val="B4C7D2"/>
+                </a:solidFill>
+                <a:latin typeface="Arial"/>
+              </a:rPr>
+              <a:t>30 °C</a:t>
+            </a:r>
+          </a:p>
+        </p:txBody>
+      </p:sp>
+      <p:sp>
+        <p:nvSpPr>
+          <p:cNvPr id="26" name="C1-E08 rect 24" descr="sci-ppt:o024"/>
+          <p:cNvSpPr/>
+          <p:nvPr/>
+        </p:nvSpPr>
+        <p:spPr>
+          <a:xfrm>
+            <a:off x="7305141" y="3747774"/>
+            <a:ext cx="1025956" cy="1281425"/>
+          </a:xfrm>
+          <a:prstGeom prst="rect">
+            <a:avLst/>
+          </a:prstGeom>
+          <a:solidFill>
+            <a:srgbClr val="8EDBD4">
+              <a:alpha val="85000"/>
+            </a:srgbClr>
+          </a:solidFill>
+          <a:ln w="12700">
+            <a:solidFill>
+              <a:srgbClr val="8EDBD4">
+                <a:alpha val="85000"/>
+              </a:srgbClr>
+            </a:solidFill>
+          </a:ln>
+          <a:effectLst/>
+        </p:spPr>
+        <p:txBody>
+          <a:bodyPr rtlCol="0" anchor="ctr"/>
+          <a:lstStyle/>
+          <a:p>
+            <a:pPr algn="ctr"/>
+          </a:p>
+        </p:txBody>
+      </p:sp>
+      <p:sp>
+        <p:nvSpPr>
+          <p:cNvPr id="27" name="C1-E08 rect 25" descr="sci-ppt:o025"/>
+          <p:cNvSpPr/>
+          <p:nvPr/>
+        </p:nvSpPr>
+        <p:spPr>
+          <a:xfrm>
+            <a:off x="7305141" y="3684033"/>
+            <a:ext cx="1025956" cy="63740"/>
+          </a:xfrm>
+          <a:prstGeom prst="rect">
+            <a:avLst/>
+          </a:prstGeom>
+          <a:solidFill>
+            <a:srgbClr val="7FC8F8">
+              <a:alpha val="85000"/>
+            </a:srgbClr>
+          </a:solidFill>
+          <a:ln w="12700">
+            <a:solidFill>
+              <a:srgbClr val="7FC8F8">
+                <a:alpha val="85000"/>
+              </a:srgbClr>
+            </a:solidFill>
+          </a:ln>
+          <a:effectLst/>
+        </p:spPr>
+        <p:txBody>
+          <a:bodyPr rtlCol="0" anchor="ctr"/>
+          <a:lstStyle/>
+          <a:p>
+            <a:pPr algn="ctr"/>
+          </a:p>
+        </p:txBody>
+      </p:sp>
+      <p:sp>
+        <p:nvSpPr>
+          <p:cNvPr id="28" name="C1-E08 rect 26" descr="sci-ppt:o026"/>
+          <p:cNvSpPr/>
+          <p:nvPr/>
+        </p:nvSpPr>
+        <p:spPr>
+          <a:xfrm>
+            <a:off x="7305141" y="3640490"/>
+            <a:ext cx="1025956" cy="43542"/>
+          </a:xfrm>
+          <a:prstGeom prst="rect">
+            <a:avLst/>
+          </a:prstGeom>
+          <a:solidFill>
+            <a:srgbClr val="F2B880">
+              <a:alpha val="85000"/>
+            </a:srgbClr>
+          </a:solidFill>
+          <a:ln w="12700">
+            <a:solidFill>
+              <a:srgbClr val="F2B880">
+                <a:alpha val="85000"/>
+              </a:srgbClr>
+            </a:solidFill>
+          </a:ln>
+          <a:effectLst/>
+        </p:spPr>
+        <p:txBody>
+          <a:bodyPr rtlCol="0" anchor="ctr"/>
+          <a:lstStyle/>
+          <a:p>
+            <a:pPr algn="ctr"/>
+          </a:p>
+        </p:txBody>
+      </p:sp>
+      <p:sp>
+        <p:nvSpPr>
+          <p:cNvPr id="29" name="C1-E08 text 27" descr="sci-ppt:o027"/>
+          <p:cNvSpPr txBox="1"/>
+          <p:nvPr/>
+        </p:nvSpPr>
+        <p:spPr>
+          <a:xfrm>
+            <a:off x="7076541" y="3347882"/>
+            <a:ext cx="1483156" cy="231648"/>
+          </a:xfrm>
+          <a:prstGeom prst="rect">
+            <a:avLst/>
+          </a:prstGeom>
+          <a:noFill/>
+          <a:effectLst/>
+        </p:spPr>
+        <p:txBody>
+          <a:bodyPr wrap="none" lIns="18288" rIns="18288" tIns="18288" bIns="18288" anchor="t">
+            <a:spAutoFit/>
+          </a:bodyPr>
+          <a:lstStyle/>
+          <a:p>
+            <a:pPr algn="ctr">
+              <a:spcAft>
+                <a:spcPts val="0"/>
+              </a:spcAft>
+            </a:pPr>
+            <a:r>
+              <a:rPr sz="1200" b="1" i="0">
+                <a:solidFill>
+                  <a:srgbClr val="E7F0F3"/>
+                </a:solidFill>
+                <a:latin typeface="Arial"/>
+              </a:rPr>
+              <a:t>p_b = 1.59</a:t>
+            </a:r>
+          </a:p>
+        </p:txBody>
+      </p:sp>
+      <p:sp>
+        <p:nvSpPr>
+          <p:cNvPr id="30" name="C1-E08 text 28" descr="sci-ppt:o028"/>
+          <p:cNvSpPr txBox="1"/>
+          <p:nvPr/>
+        </p:nvSpPr>
+        <p:spPr>
+          <a:xfrm>
+            <a:off x="7122261" y="5111496"/>
+            <a:ext cx="1391716" cy="223900"/>
+          </a:xfrm>
+          <a:prstGeom prst="rect">
+            <a:avLst/>
+          </a:prstGeom>
+          <a:noFill/>
+          <a:effectLst/>
+        </p:spPr>
+        <p:txBody>
+          <a:bodyPr wrap="none" lIns="18288" rIns="18288" tIns="18288" bIns="18288" anchor="t">
+            <a:spAutoFit/>
+          </a:bodyPr>
+          <a:lstStyle/>
+          <a:p>
+            <a:pPr algn="ctr">
+              <a:spcAft>
+                <a:spcPts val="0"/>
+              </a:spcAft>
+            </a:pPr>
+            <a:r>
+              <a:rPr sz="1150" b="0" i="0">
+                <a:solidFill>
+                  <a:srgbClr val="B4C7D2"/>
+                </a:solidFill>
+                <a:latin typeface="Arial"/>
+              </a:rPr>
+              <a:t>40 °C</a:t>
+            </a:r>
+          </a:p>
+        </p:txBody>
+      </p:sp>
+      <p:sp>
+        <p:nvSpPr>
+          <p:cNvPr id="31" name="C1-E08 rect 29" descr="sci-ppt:o029"/>
+          <p:cNvSpPr/>
+          <p:nvPr/>
+        </p:nvSpPr>
+        <p:spPr>
+          <a:xfrm>
+            <a:off x="8859621" y="3249763"/>
+            <a:ext cx="1025956" cy="1779436"/>
+          </a:xfrm>
+          <a:prstGeom prst="rect">
+            <a:avLst/>
+          </a:prstGeom>
+          <a:solidFill>
+            <a:srgbClr val="8EDBD4">
+              <a:alpha val="85000"/>
+            </a:srgbClr>
+          </a:solidFill>
+          <a:ln w="12700">
+            <a:solidFill>
+              <a:srgbClr val="8EDBD4">
+                <a:alpha val="85000"/>
+              </a:srgbClr>
+            </a:solidFill>
+          </a:ln>
+          <a:effectLst/>
+        </p:spPr>
+        <p:txBody>
+          <a:bodyPr rtlCol="0" anchor="ctr"/>
+          <a:lstStyle/>
+          <a:p>
+            <a:pPr algn="ctr"/>
+          </a:p>
+        </p:txBody>
+      </p:sp>
+      <p:sp>
+        <p:nvSpPr>
+          <p:cNvPr id="32" name="C1-E08 rect 30" descr="sci-ppt:o030"/>
+          <p:cNvSpPr/>
+          <p:nvPr/>
+        </p:nvSpPr>
+        <p:spPr>
+          <a:xfrm>
+            <a:off x="8859621" y="3143099"/>
+            <a:ext cx="1025956" cy="106664"/>
+          </a:xfrm>
+          <a:prstGeom prst="rect">
+            <a:avLst/>
+          </a:prstGeom>
+          <a:solidFill>
+            <a:srgbClr val="7FC8F8">
+              <a:alpha val="85000"/>
+            </a:srgbClr>
+          </a:solidFill>
+          <a:ln w="12700">
+            <a:solidFill>
+              <a:srgbClr val="7FC8F8">
+                <a:alpha val="85000"/>
+              </a:srgbClr>
+            </a:solidFill>
+          </a:ln>
+          <a:effectLst/>
+        </p:spPr>
+        <p:txBody>
+          <a:bodyPr rtlCol="0" anchor="ctr"/>
+          <a:lstStyle/>
+          <a:p>
+            <a:pPr algn="ctr"/>
+          </a:p>
+        </p:txBody>
+      </p:sp>
+      <p:sp>
+        <p:nvSpPr>
+          <p:cNvPr id="33" name="C1-E08 rect 31" descr="sci-ppt:o031"/>
+          <p:cNvSpPr/>
+          <p:nvPr/>
+        </p:nvSpPr>
+        <p:spPr>
+          <a:xfrm>
+            <a:off x="8859621" y="3099556"/>
+            <a:ext cx="1025956" cy="43542"/>
+          </a:xfrm>
+          <a:prstGeom prst="rect">
+            <a:avLst/>
+          </a:prstGeom>
+          <a:solidFill>
+            <a:srgbClr val="F2B880">
+              <a:alpha val="85000"/>
+            </a:srgbClr>
+          </a:solidFill>
+          <a:ln w="12700">
+            <a:solidFill>
+              <a:srgbClr val="F2B880">
+                <a:alpha val="85000"/>
+              </a:srgbClr>
+            </a:solidFill>
+          </a:ln>
+          <a:effectLst/>
+        </p:spPr>
+        <p:txBody>
+          <a:bodyPr rtlCol="0" anchor="ctr"/>
+          <a:lstStyle/>
+          <a:p>
+            <a:pPr algn="ctr"/>
+          </a:p>
+        </p:txBody>
+      </p:sp>
+      <p:sp>
+        <p:nvSpPr>
+          <p:cNvPr id="34" name="C1-E08 text 32" descr="sci-ppt:o032"/>
+          <p:cNvSpPr txBox="1"/>
+          <p:nvPr/>
+        </p:nvSpPr>
+        <p:spPr>
+          <a:xfrm>
+            <a:off x="8631021" y="2806948"/>
+            <a:ext cx="1483156" cy="231648"/>
+          </a:xfrm>
+          <a:prstGeom prst="rect">
+            <a:avLst/>
+          </a:prstGeom>
+          <a:noFill/>
+          <a:effectLst/>
+        </p:spPr>
+        <p:txBody>
+          <a:bodyPr wrap="none" lIns="18288" rIns="18288" tIns="18288" bIns="18288" anchor="t">
+            <a:spAutoFit/>
+          </a:bodyPr>
+          <a:lstStyle/>
+          <a:p>
+            <a:pPr algn="ctr">
+              <a:spcAft>
+                <a:spcPts val="0"/>
+              </a:spcAft>
+            </a:pPr>
+            <a:r>
+              <a:rPr sz="1200" b="1" i="0">
+                <a:solidFill>
+                  <a:srgbClr val="E7F0F3"/>
+                </a:solidFill>
+                <a:latin typeface="Arial"/>
+              </a:rPr>
+              <a:t>p_b = 2.22</a:t>
+            </a:r>
+          </a:p>
+        </p:txBody>
+      </p:sp>
+      <p:sp>
+        <p:nvSpPr>
+          <p:cNvPr id="35" name="C1-E08 text 33" descr="sci-ppt:o033"/>
+          <p:cNvSpPr txBox="1"/>
+          <p:nvPr/>
+        </p:nvSpPr>
+        <p:spPr>
+          <a:xfrm>
+            <a:off x="8676741" y="5111496"/>
+            <a:ext cx="1391716" cy="223900"/>
+          </a:xfrm>
+          <a:prstGeom prst="rect">
+            <a:avLst/>
+          </a:prstGeom>
+          <a:noFill/>
+          <a:effectLst/>
+        </p:spPr>
+        <p:txBody>
+          <a:bodyPr wrap="none" lIns="18288" rIns="18288" tIns="18288" bIns="18288" anchor="t">
+            <a:spAutoFit/>
+          </a:bodyPr>
+          <a:lstStyle/>
+          <a:p>
+            <a:pPr algn="ctr">
+              <a:spcAft>
+                <a:spcPts val="0"/>
+              </a:spcAft>
+            </a:pPr>
+            <a:r>
+              <a:rPr sz="1150" b="0" i="0">
+                <a:solidFill>
+                  <a:srgbClr val="B4C7D2"/>
+                </a:solidFill>
+                <a:latin typeface="Arial"/>
+              </a:rPr>
+              <a:t>50 °C</a:t>
+            </a:r>
+          </a:p>
+        </p:txBody>
+      </p:sp>
+      <p:sp>
+        <p:nvSpPr>
+          <p:cNvPr id="36" name="C1-E08 rect 34" descr="sci-ppt:o034"/>
+          <p:cNvSpPr/>
+          <p:nvPr/>
+        </p:nvSpPr>
+        <p:spPr>
+          <a:xfrm>
+            <a:off x="10414101" y="2612925"/>
+            <a:ext cx="1025956" cy="2416274"/>
+          </a:xfrm>
+          <a:prstGeom prst="rect">
+            <a:avLst/>
+          </a:prstGeom>
+          <a:solidFill>
+            <a:srgbClr val="8EDBD4">
+              <a:alpha val="85000"/>
+            </a:srgbClr>
+          </a:solidFill>
+          <a:ln w="12700">
+            <a:solidFill>
+              <a:srgbClr val="8EDBD4">
+                <a:alpha val="85000"/>
+              </a:srgbClr>
+            </a:solidFill>
+          </a:ln>
+          <a:effectLst/>
+        </p:spPr>
+        <p:txBody>
+          <a:bodyPr rtlCol="0" anchor="ctr"/>
+          <a:lstStyle/>
+          <a:p>
+            <a:pPr algn="ctr"/>
+          </a:p>
+        </p:txBody>
+      </p:sp>
+      <p:sp>
+        <p:nvSpPr>
+          <p:cNvPr id="37" name="C1-E08 rect 35" descr="sci-ppt:o035"/>
+          <p:cNvSpPr/>
+          <p:nvPr/>
+        </p:nvSpPr>
+        <p:spPr>
+          <a:xfrm>
+            <a:off x="10414101" y="2440586"/>
+            <a:ext cx="1025956" cy="172339"/>
+          </a:xfrm>
+          <a:prstGeom prst="rect">
+            <a:avLst/>
+          </a:prstGeom>
+          <a:solidFill>
+            <a:srgbClr val="7FC8F8">
+              <a:alpha val="85000"/>
+            </a:srgbClr>
+          </a:solidFill>
+          <a:ln w="12700">
+            <a:solidFill>
+              <a:srgbClr val="7FC8F8">
+                <a:alpha val="85000"/>
+              </a:srgbClr>
+            </a:solidFill>
+          </a:ln>
+          <a:effectLst/>
+        </p:spPr>
+        <p:txBody>
+          <a:bodyPr rtlCol="0" anchor="ctr"/>
+          <a:lstStyle/>
+          <a:p>
+            <a:pPr algn="ctr"/>
+          </a:p>
+        </p:txBody>
+      </p:sp>
+      <p:sp>
+        <p:nvSpPr>
+          <p:cNvPr id="38" name="C1-E08 rect 36" descr="sci-ppt:o036"/>
+          <p:cNvSpPr/>
+          <p:nvPr/>
+        </p:nvSpPr>
+        <p:spPr>
+          <a:xfrm>
+            <a:off x="10414101" y="2397043"/>
+            <a:ext cx="1025956" cy="43542"/>
+          </a:xfrm>
+          <a:prstGeom prst="rect">
+            <a:avLst/>
+          </a:prstGeom>
+          <a:solidFill>
+            <a:srgbClr val="F2B880">
+              <a:alpha val="85000"/>
+            </a:srgbClr>
+          </a:solidFill>
+          <a:ln w="12700">
+            <a:solidFill>
+              <a:srgbClr val="F2B880">
+                <a:alpha val="85000"/>
+              </a:srgbClr>
+            </a:solidFill>
+          </a:ln>
+          <a:effectLst/>
+        </p:spPr>
+        <p:txBody>
+          <a:bodyPr rtlCol="0" anchor="ctr"/>
+          <a:lstStyle/>
+          <a:p>
+            <a:pPr algn="ctr"/>
+          </a:p>
+        </p:txBody>
+      </p:sp>
+      <p:sp>
+        <p:nvSpPr>
+          <p:cNvPr id="39" name="C1-E08 text 37" descr="sci-ppt:o037"/>
+          <p:cNvSpPr txBox="1"/>
+          <p:nvPr/>
+        </p:nvSpPr>
+        <p:spPr>
+          <a:xfrm>
+            <a:off x="10185501" y="2104435"/>
+            <a:ext cx="1483156" cy="231648"/>
+          </a:xfrm>
+          <a:prstGeom prst="rect">
+            <a:avLst/>
+          </a:prstGeom>
+          <a:noFill/>
+          <a:effectLst/>
+        </p:spPr>
+        <p:txBody>
+          <a:bodyPr wrap="none" lIns="18288" rIns="18288" tIns="18288" bIns="18288" anchor="t">
+            <a:spAutoFit/>
+          </a:bodyPr>
+          <a:lstStyle/>
+          <a:p>
+            <a:pPr algn="ctr">
+              <a:spcAft>
+                <a:spcPts val="0"/>
+              </a:spcAft>
+            </a:pPr>
+            <a:r>
+              <a:rPr sz="1200" b="1" i="0">
+                <a:solidFill>
+                  <a:srgbClr val="E7F0F3"/>
+                </a:solidFill>
+                <a:latin typeface="Arial"/>
+              </a:rPr>
+              <a:t>p_b = 3.02</a:t>
+            </a:r>
+          </a:p>
+        </p:txBody>
+      </p:sp>
+      <p:sp>
+        <p:nvSpPr>
+          <p:cNvPr id="40" name="C1-E08 text 38" descr="sci-ppt:o038"/>
+          <p:cNvSpPr txBox="1"/>
+          <p:nvPr/>
+        </p:nvSpPr>
+        <p:spPr>
+          <a:xfrm>
+            <a:off x="10231221" y="5111496"/>
+            <a:ext cx="1391716" cy="223900"/>
+          </a:xfrm>
+          <a:prstGeom prst="rect">
+            <a:avLst/>
+          </a:prstGeom>
+          <a:noFill/>
+          <a:effectLst/>
+        </p:spPr>
+        <p:txBody>
+          <a:bodyPr wrap="none" lIns="18288" rIns="18288" tIns="18288" bIns="18288" anchor="t">
+            <a:spAutoFit/>
+          </a:bodyPr>
+          <a:lstStyle/>
+          <a:p>
+            <a:pPr algn="ctr">
+              <a:spcAft>
+                <a:spcPts val="0"/>
+              </a:spcAft>
+            </a:pPr>
+            <a:r>
+              <a:rPr sz="1150" b="0" i="0">
+                <a:solidFill>
+                  <a:srgbClr val="B4C7D2"/>
+                </a:solidFill>
+                <a:latin typeface="Arial"/>
+              </a:rPr>
+              <a:t>60 °C</a:t>
+            </a:r>
+          </a:p>
+        </p:txBody>
+      </p:sp>
+      <p:sp>
+        <p:nvSpPr>
+          <p:cNvPr id="41" name="C1-E08 text 39" descr="sci-ppt:o039"/>
+          <p:cNvSpPr txBox="1"/>
+          <p:nvPr/>
+        </p:nvSpPr>
+        <p:spPr>
+          <a:xfrm>
+            <a:off x="5029200" y="5440680"/>
+            <a:ext cx="6858000" cy="417576"/>
+          </a:xfrm>
+          <a:prstGeom prst="rect">
+            <a:avLst/>
+          </a:prstGeom>
+          <a:noFill/>
+          <a:effectLst/>
+        </p:spPr>
+        <p:txBody>
+          <a:bodyPr wrap="none" lIns="18288" rIns="18288" tIns="18288" bIns="18288" anchor="t">
             <a:spAutoFit/>
           </a:bodyPr>
           <a:lstStyle/>
@@ -3237,37 +4421,125 @@
               </a:spcAft>
             </a:pPr>
             <a:r>
-              <a:rPr sz="1728" b="0" i="0">
+              <a:rPr sz="1200" b="0" i="0">
+                <a:solidFill>
+                  <a:srgbClr val="B4C7D2"/>
+                </a:solidFill>
+                <a:latin typeface="Arial"/>
+              </a:rPr>
+              <a:t>Bars are saturation values (upper bounds) from C2-E12 and C2-E13. The 0.05 bar gas</a:t>
+            </a:r>
+          </a:p>
+          <a:p>
+            <a:pPr algn="l">
+              <a:spcAft>
+                <a:spcPts val="0"/>
+              </a:spcAft>
+            </a:pPr>
+            <a:r>
+              <a:rPr sz="1200" b="0" i="0">
+                <a:solidFill>
+                  <a:srgbClr val="B4C7D2"/>
+                </a:solidFill>
+                <a:latin typeface="Arial"/>
+              </a:rPr>
+              <a:t>part is an assumed placeholder.</a:t>
+            </a:r>
+          </a:p>
+        </p:txBody>
+      </p:sp>
+      <p:sp>
+        <p:nvSpPr>
+          <p:cNvPr id="42" name="C1-E08 rect 40" descr="sci-ppt:o040"/>
+          <p:cNvSpPr/>
+          <p:nvPr/>
+        </p:nvSpPr>
+        <p:spPr>
+          <a:xfrm>
+            <a:off x="5029200" y="6016752"/>
+            <a:ext cx="228600" cy="201168"/>
+          </a:xfrm>
+          <a:prstGeom prst="rect">
+            <a:avLst/>
+          </a:prstGeom>
+          <a:solidFill>
+            <a:srgbClr val="8EDBD4"/>
+          </a:solidFill>
+          <a:ln w="12700">
+            <a:solidFill>
+              <a:srgbClr val="8EDBD4"/>
+            </a:solidFill>
+          </a:ln>
+          <a:effectLst/>
+        </p:spPr>
+        <p:txBody>
+          <a:bodyPr rtlCol="0" anchor="ctr"/>
+          <a:lstStyle/>
+          <a:p>
+            <a:pPr algn="ctr"/>
+          </a:p>
+        </p:txBody>
+      </p:sp>
+      <p:sp>
+        <p:nvSpPr>
+          <p:cNvPr id="43" name="C1-E08 text 41" descr="sci-ppt:o041"/>
+          <p:cNvSpPr txBox="1"/>
+          <p:nvPr/>
+        </p:nvSpPr>
+        <p:spPr>
+          <a:xfrm>
+            <a:off x="5321808" y="5961888"/>
+            <a:ext cx="2011680" cy="231648"/>
+          </a:xfrm>
+          <a:prstGeom prst="rect">
+            <a:avLst/>
+          </a:prstGeom>
+          <a:noFill/>
+          <a:effectLst/>
+        </p:spPr>
+        <p:txBody>
+          <a:bodyPr wrap="none" lIns="18288" rIns="18288" tIns="18288" bIns="18288" anchor="t">
+            <a:spAutoFit/>
+          </a:bodyPr>
+          <a:lstStyle/>
+          <a:p>
+            <a:pPr algn="l">
+              <a:spcAft>
+                <a:spcPts val="0"/>
+              </a:spcAft>
+            </a:pPr>
+            <a:r>
+              <a:rPr sz="1200" b="0" i="0">
                 <a:solidFill>
                   <a:srgbClr val="E7F0F3"/>
                 </a:solidFill>
                 <a:latin typeface="Arial"/>
               </a:rPr>
-              <a:t>+ permanent gas</a:t>
-            </a:r>
-          </a:p>
-        </p:txBody>
-      </p:sp>
-      <p:sp>
-        <p:nvSpPr>
-          <p:cNvPr id="6" name="ellipse5" descr="sci-ppt:C1-E08-005"/>
+              <a:t>PFC vapor</a:t>
+            </a:r>
+          </a:p>
+        </p:txBody>
+      </p:sp>
+      <p:sp>
+        <p:nvSpPr>
+          <p:cNvPr id="44" name="C1-E08 rect 42" descr="sci-ppt:o042"/>
           <p:cNvSpPr/>
           <p:nvPr/>
         </p:nvSpPr>
         <p:spPr>
           <a:xfrm>
-            <a:off x="3474720" y="3108960"/>
-            <a:ext cx="487680" cy="487680"/>
-          </a:xfrm>
-          <a:prstGeom prst="ellipse">
+            <a:off x="7315200" y="6016752"/>
+            <a:ext cx="228600" cy="201168"/>
+          </a:xfrm>
+          <a:prstGeom prst="rect">
             <a:avLst/>
           </a:prstGeom>
           <a:solidFill>
-            <a:srgbClr val="F6BC77"/>
+            <a:srgbClr val="7FC8F8"/>
           </a:solidFill>
-          <a:ln w="21590">
+          <a:ln w="12700">
             <a:solidFill>
-              <a:srgbClr val="B4C7D2"/>
+              <a:srgbClr val="7FC8F8"/>
             </a:solidFill>
           </a:ln>
           <a:effectLst/>
@@ -3282,14 +4554,14 @@
       </p:sp>
       <p:sp>
         <p:nvSpPr>
-          <p:cNvPr id="7" name="text6" descr="sci-ppt:C1-E08-006"/>
+          <p:cNvPr id="45" name="C1-E08 text 43" descr="sci-ppt:o043"/>
           <p:cNvSpPr txBox="1"/>
           <p:nvPr/>
         </p:nvSpPr>
         <p:spPr>
           <a:xfrm>
-            <a:off x="5486400" y="2194560"/>
-            <a:ext cx="5852160" cy="396849"/>
+            <a:off x="7607808" y="5961888"/>
+            <a:ext cx="2011680" cy="231648"/>
           </a:xfrm>
           <a:prstGeom prst="rect">
             <a:avLst/>
@@ -3298,7 +4570,7 @@
           <a:effectLst/>
         </p:spPr>
         <p:txBody>
-          <a:bodyPr wrap="none" lIns="27432" rIns="27432" tIns="18288" bIns="18288" anchor="ctr">
+          <a:bodyPr wrap="none" lIns="18288" rIns="18288" tIns="18288" bIns="18288" anchor="t">
             <a:spAutoFit/>
           </a:bodyPr>
           <a:lstStyle/>
@@ -3309,27 +4581,59 @@
               </a:spcAft>
             </a:pPr>
             <a:r>
-              <a:rPr sz="2016" b="0" i="0">
+              <a:rPr sz="1200" b="0" i="0">
                 <a:solidFill>
                   <a:srgbClr val="E7F0F3"/>
                 </a:solidFill>
                 <a:latin typeface="Arial"/>
               </a:rPr>
-              <a:t>p_b = p_v,PFC + p_v,w + p_g</a:t>
-            </a:r>
-          </a:p>
-        </p:txBody>
-      </p:sp>
-      <p:sp>
-        <p:nvSpPr>
-          <p:cNvPr id="8" name="text7" descr="sci-ppt:C1-E08-007"/>
+              <a:t>water vapor</a:t>
+            </a:r>
+          </a:p>
+        </p:txBody>
+      </p:sp>
+      <p:sp>
+        <p:nvSpPr>
+          <p:cNvPr id="46" name="C1-E08 rect 44" descr="sci-ppt:o044"/>
+          <p:cNvSpPr/>
+          <p:nvPr/>
+        </p:nvSpPr>
+        <p:spPr>
+          <a:xfrm>
+            <a:off x="9601200" y="6016752"/>
+            <a:ext cx="228600" cy="201168"/>
+          </a:xfrm>
+          <a:prstGeom prst="rect">
+            <a:avLst/>
+          </a:prstGeom>
+          <a:solidFill>
+            <a:srgbClr val="F2B880"/>
+          </a:solidFill>
+          <a:ln w="12700">
+            <a:solidFill>
+              <a:srgbClr val="F2B880"/>
+            </a:solidFill>
+          </a:ln>
+          <a:effectLst/>
+        </p:spPr>
+        <p:txBody>
+          <a:bodyPr rtlCol="0" anchor="ctr"/>
+          <a:lstStyle/>
+          <a:p>
+            <a:pPr algn="ctr"/>
+          </a:p>
+        </p:txBody>
+      </p:sp>
+      <p:sp>
+        <p:nvSpPr>
+          <p:cNvPr id="47" name="C1-E08 text 45" descr="sci-ppt:o045"/>
           <p:cNvSpPr txBox="1"/>
           <p:nvPr/>
         </p:nvSpPr>
         <p:spPr>
           <a:xfrm>
-            <a:off x="5486400" y="2926080"/>
-            <a:ext cx="5852160" cy="340156"/>
+            <a:off x="9893808" y="5961888"/>
+            <a:ext cx="2011680" cy="231648"/>
           </a:xfrm>
           <a:prstGeom prst="rect">
             <a:avLst/>
@@ -3338,7 +4642,7 @@
           <a:effectLst/>
         </p:spPr>
         <p:txBody>
-          <a:bodyPr wrap="none" lIns="27432" rIns="27432" tIns="18288" bIns="18288" anchor="ctr">
+          <a:bodyPr wrap="none" lIns="18288" rIns="18288" tIns="18288" bIns="18288" anchor="t">
             <a:spAutoFit/>
           </a:bodyPr>
           <a:lstStyle/>
@@ -3349,27 +4653,59 @@
               </a:spcAft>
             </a:pPr>
             <a:r>
-              <a:rPr sz="1728" b="0" i="0">
+              <a:rPr sz="1200" b="0" i="0">
                 <a:solidFill>
                   <a:srgbClr val="E7F0F3"/>
                 </a:solidFill>
                 <a:latin typeface="Arial"/>
               </a:rPr>
-              <a:t>Residual PFC liquid: finite inventory</a:t>
-            </a:r>
-          </a:p>
-        </p:txBody>
-      </p:sp>
-      <p:sp>
-        <p:nvSpPr>
-          <p:cNvPr id="9" name="text8" descr="sci-ppt:C1-E08-008"/>
+              <a:t>permanent gas</a:t>
+            </a:r>
+          </a:p>
+        </p:txBody>
+      </p:sp>
+      <p:sp>
+        <p:nvSpPr>
+          <p:cNvPr id="48" name="C1-E08 round_rect 46" descr="sci-ppt:o046"/>
+          <p:cNvSpPr/>
+          <p:nvPr/>
+        </p:nvSpPr>
+        <p:spPr>
+          <a:xfrm>
+            <a:off x="365760" y="914400"/>
+            <a:ext cx="4206240" cy="5029200"/>
+          </a:xfrm>
+          <a:prstGeom prst="roundRect">
+            <a:avLst/>
+          </a:prstGeom>
+          <a:solidFill>
+            <a:srgbClr val="213E4B"/>
+          </a:solidFill>
+          <a:ln w="20320">
+            <a:solidFill>
+              <a:srgbClr val="8EDBD4"/>
+            </a:solidFill>
+          </a:ln>
+          <a:effectLst/>
+        </p:spPr>
+        <p:txBody>
+          <a:bodyPr rtlCol="0" anchor="ctr"/>
+          <a:lstStyle/>
+          <a:p>
+            <a:pPr algn="ctr"/>
+          </a:p>
+        </p:txBody>
+      </p:sp>
+      <p:sp>
+        <p:nvSpPr>
+          <p:cNvPr id="49" name="C1-E08 text 47" descr="sci-ppt:o047"/>
           <p:cNvSpPr txBox="1"/>
           <p:nvPr/>
         </p:nvSpPr>
         <p:spPr>
           <a:xfrm>
-            <a:off x="365760" y="4974336"/>
-            <a:ext cx="5547360" cy="321259"/>
+            <a:off x="475488" y="969264"/>
+            <a:ext cx="3986783" cy="254889"/>
           </a:xfrm>
           <a:prstGeom prst="rect">
             <a:avLst/>
@@ -3378,7 +4714,7 @@
           <a:effectLst/>
         </p:spPr>
         <p:txBody>
-          <a:bodyPr wrap="none" lIns="27432" rIns="27432" tIns="18288" bIns="18288" anchor="ctr">
+          <a:bodyPr wrap="none" lIns="18288" rIns="18288" tIns="18288" bIns="18288" anchor="t">
             <a:spAutoFit/>
           </a:bodyPr>
           <a:lstStyle/>
@@ -3389,39 +4725,671 @@
               </a:spcAft>
             </a:pPr>
             <a:r>
-              <a:rPr sz="1632" b="0" i="0">
+              <a:rPr sz="1350" b="1" i="0">
+                <a:solidFill>
+                  <a:srgbClr val="8EDBD4"/>
+                </a:solidFill>
+                <a:latin typeface="Arial"/>
+              </a:rPr>
+              <a:t>Dalton additivity in one bubble</a:t>
+            </a:r>
+          </a:p>
+        </p:txBody>
+      </p:sp>
+      <p:sp>
+        <p:nvSpPr>
+          <p:cNvPr id="50" name="C1-E08 text 48" descr="sci-ppt:o048"/>
+          <p:cNvSpPr txBox="1"/>
+          <p:nvPr/>
+        </p:nvSpPr>
+        <p:spPr>
+          <a:xfrm>
+            <a:off x="502920" y="1417320"/>
+            <a:ext cx="3931920" cy="270383"/>
+          </a:xfrm>
+          <a:prstGeom prst="rect">
+            <a:avLst/>
+          </a:prstGeom>
+          <a:noFill/>
+          <a:effectLst/>
+        </p:spPr>
+        <p:txBody>
+          <a:bodyPr wrap="none" lIns="18288" rIns="18288" tIns="18288" bIns="18288" anchor="t">
+            <a:spAutoFit/>
+          </a:bodyPr>
+          <a:lstStyle/>
+          <a:p>
+            <a:pPr algn="l">
+              <a:spcAft>
+                <a:spcPts val="0"/>
+              </a:spcAft>
+            </a:pPr>
+            <a:r>
+              <a:rPr sz="1450" b="1" i="0">
+                <a:solidFill>
+                  <a:srgbClr val="F2B880"/>
+                </a:solidFill>
+                <a:latin typeface="Arial"/>
+              </a:rPr>
+              <a:t>p_b = pᵥ,PFC + pᵥ,w + p_g</a:t>
+            </a:r>
+          </a:p>
+        </p:txBody>
+      </p:sp>
+      <p:sp>
+        <p:nvSpPr>
+          <p:cNvPr id="51" name="C1-E08 ellipse 49" descr="sci-ppt:o049"/>
+          <p:cNvSpPr/>
+          <p:nvPr/>
+        </p:nvSpPr>
+        <p:spPr>
+          <a:xfrm>
+            <a:off x="1143000" y="2057400"/>
+            <a:ext cx="2651760" cy="2651760"/>
+          </a:xfrm>
+          <a:prstGeom prst="ellipse">
+            <a:avLst/>
+          </a:prstGeom>
+          <a:solidFill>
+            <a:srgbClr val="0C1820"/>
+          </a:solidFill>
+          <a:ln w="27940">
+            <a:solidFill>
+              <a:srgbClr val="F2B880"/>
+            </a:solidFill>
+          </a:ln>
+          <a:effectLst/>
+        </p:spPr>
+        <p:txBody>
+          <a:bodyPr rtlCol="0" anchor="ctr"/>
+          <a:lstStyle/>
+          <a:p>
+            <a:pPr algn="ctr"/>
+          </a:p>
+        </p:txBody>
+      </p:sp>
+      <p:sp>
+        <p:nvSpPr>
+          <p:cNvPr id="52" name="C1-E08 ellipse 50" descr="sci-ppt:o050"/>
+          <p:cNvSpPr/>
+          <p:nvPr/>
+        </p:nvSpPr>
+        <p:spPr>
+          <a:xfrm>
+            <a:off x="2425551" y="3646564"/>
+            <a:ext cx="146304" cy="146304"/>
+          </a:xfrm>
+          <a:prstGeom prst="ellipse">
+            <a:avLst/>
+          </a:prstGeom>
+          <a:solidFill>
+            <a:srgbClr val="8EDBD4"/>
+          </a:solidFill>
+          <a:ln w="12700">
+            <a:solidFill>
+              <a:srgbClr val="8EDBD4"/>
+            </a:solidFill>
+          </a:ln>
+          <a:effectLst/>
+        </p:spPr>
+        <p:txBody>
+          <a:bodyPr rtlCol="0" anchor="ctr"/>
+          <a:lstStyle/>
+          <a:p>
+            <a:pPr algn="ctr"/>
+          </a:p>
+        </p:txBody>
+      </p:sp>
+      <p:sp>
+        <p:nvSpPr>
+          <p:cNvPr id="53" name="C1-E08 ellipse 51" descr="sci-ppt:o051"/>
+          <p:cNvSpPr/>
+          <p:nvPr/>
+        </p:nvSpPr>
+        <p:spPr>
+          <a:xfrm>
+            <a:off x="2067271" y="3562082"/>
+            <a:ext cx="146304" cy="146304"/>
+          </a:xfrm>
+          <a:prstGeom prst="ellipse">
+            <a:avLst/>
+          </a:prstGeom>
+          <a:solidFill>
+            <a:srgbClr val="8EDBD4"/>
+          </a:solidFill>
+          <a:ln w="12700">
+            <a:solidFill>
+              <a:srgbClr val="8EDBD4"/>
+            </a:solidFill>
+          </a:ln>
+          <a:effectLst/>
+        </p:spPr>
+        <p:txBody>
+          <a:bodyPr rtlCol="0" anchor="ctr"/>
+          <a:lstStyle/>
+          <a:p>
+            <a:pPr algn="ctr"/>
+          </a:p>
+        </p:txBody>
+      </p:sp>
+      <p:sp>
+        <p:nvSpPr>
+          <p:cNvPr id="54" name="C1-E08 ellipse 52" descr="sci-ppt:o052"/>
+          <p:cNvSpPr/>
+          <p:nvPr/>
+        </p:nvSpPr>
+        <p:spPr>
+          <a:xfrm>
+            <a:off x="3004817" y="3580462"/>
+            <a:ext cx="146304" cy="146304"/>
+          </a:xfrm>
+          <a:prstGeom prst="ellipse">
+            <a:avLst/>
+          </a:prstGeom>
+          <a:solidFill>
+            <a:srgbClr val="8EDBD4"/>
+          </a:solidFill>
+          <a:ln w="12700">
+            <a:solidFill>
+              <a:srgbClr val="8EDBD4"/>
+            </a:solidFill>
+          </a:ln>
+          <a:effectLst/>
+        </p:spPr>
+        <p:txBody>
+          <a:bodyPr rtlCol="0" anchor="ctr"/>
+          <a:lstStyle/>
+          <a:p>
+            <a:pPr algn="ctr"/>
+          </a:p>
+        </p:txBody>
+      </p:sp>
+      <p:sp>
+        <p:nvSpPr>
+          <p:cNvPr id="55" name="C1-E08 ellipse 53" descr="sci-ppt:o053"/>
+          <p:cNvSpPr/>
+          <p:nvPr/>
+        </p:nvSpPr>
+        <p:spPr>
+          <a:xfrm>
+            <a:off x="3212914" y="2843942"/>
+            <a:ext cx="146304" cy="146304"/>
+          </a:xfrm>
+          <a:prstGeom prst="ellipse">
+            <a:avLst/>
+          </a:prstGeom>
+          <a:solidFill>
+            <a:srgbClr val="8EDBD4"/>
+          </a:solidFill>
+          <a:ln w="12700">
+            <a:solidFill>
+              <a:srgbClr val="8EDBD4"/>
+            </a:solidFill>
+          </a:ln>
+          <a:effectLst/>
+        </p:spPr>
+        <p:txBody>
+          <a:bodyPr rtlCol="0" anchor="ctr"/>
+          <a:lstStyle/>
+          <a:p>
+            <a:pPr algn="ctr"/>
+          </a:p>
+        </p:txBody>
+      </p:sp>
+      <p:sp>
+        <p:nvSpPr>
+          <p:cNvPr id="56" name="C1-E08 ellipse 54" descr="sci-ppt:o054"/>
+          <p:cNvSpPr/>
+          <p:nvPr/>
+        </p:nvSpPr>
+        <p:spPr>
+          <a:xfrm>
+            <a:off x="2441649" y="2816878"/>
+            <a:ext cx="146304" cy="146304"/>
+          </a:xfrm>
+          <a:prstGeom prst="ellipse">
+            <a:avLst/>
+          </a:prstGeom>
+          <a:solidFill>
+            <a:srgbClr val="8EDBD4"/>
+          </a:solidFill>
+          <a:ln w="12700">
+            <a:solidFill>
+              <a:srgbClr val="8EDBD4"/>
+            </a:solidFill>
+          </a:ln>
+          <a:effectLst/>
+        </p:spPr>
+        <p:txBody>
+          <a:bodyPr rtlCol="0" anchor="ctr"/>
+          <a:lstStyle/>
+          <a:p>
+            <a:pPr algn="ctr"/>
+          </a:p>
+        </p:txBody>
+      </p:sp>
+      <p:sp>
+        <p:nvSpPr>
+          <p:cNvPr id="57" name="C1-E08 ellipse 55" descr="sci-ppt:o055"/>
+          <p:cNvSpPr/>
+          <p:nvPr/>
+        </p:nvSpPr>
+        <p:spPr>
+          <a:xfrm>
+            <a:off x="1857010" y="3184696"/>
+            <a:ext cx="146304" cy="146304"/>
+          </a:xfrm>
+          <a:prstGeom prst="ellipse">
+            <a:avLst/>
+          </a:prstGeom>
+          <a:solidFill>
+            <a:srgbClr val="8EDBD4"/>
+          </a:solidFill>
+          <a:ln w="12700">
+            <a:solidFill>
+              <a:srgbClr val="8EDBD4"/>
+            </a:solidFill>
+          </a:ln>
+          <a:effectLst/>
+        </p:spPr>
+        <p:txBody>
+          <a:bodyPr rtlCol="0" anchor="ctr"/>
+          <a:lstStyle/>
+          <a:p>
+            <a:pPr algn="ctr"/>
+          </a:p>
+        </p:txBody>
+      </p:sp>
+      <p:sp>
+        <p:nvSpPr>
+          <p:cNvPr id="58" name="C1-E08 ellipse 56" descr="sci-ppt:o056"/>
+          <p:cNvSpPr/>
+          <p:nvPr/>
+        </p:nvSpPr>
+        <p:spPr>
+          <a:xfrm>
+            <a:off x="2555921" y="3613035"/>
+            <a:ext cx="146304" cy="146304"/>
+          </a:xfrm>
+          <a:prstGeom prst="ellipse">
+            <a:avLst/>
+          </a:prstGeom>
+          <a:solidFill>
+            <a:srgbClr val="8EDBD4"/>
+          </a:solidFill>
+          <a:ln w="12700">
+            <a:solidFill>
+              <a:srgbClr val="8EDBD4"/>
+            </a:solidFill>
+          </a:ln>
+          <a:effectLst/>
+        </p:spPr>
+        <p:txBody>
+          <a:bodyPr rtlCol="0" anchor="ctr"/>
+          <a:lstStyle/>
+          <a:p>
+            <a:pPr algn="ctr"/>
+          </a:p>
+        </p:txBody>
+      </p:sp>
+      <p:sp>
+        <p:nvSpPr>
+          <p:cNvPr id="59" name="C1-E08 ellipse 57" descr="sci-ppt:o057"/>
+          <p:cNvSpPr/>
+          <p:nvPr/>
+        </p:nvSpPr>
+        <p:spPr>
+          <a:xfrm>
+            <a:off x="2621039" y="4297456"/>
+            <a:ext cx="146304" cy="146304"/>
+          </a:xfrm>
+          <a:prstGeom prst="ellipse">
+            <a:avLst/>
+          </a:prstGeom>
+          <a:solidFill>
+            <a:srgbClr val="8EDBD4"/>
+          </a:solidFill>
+          <a:ln w="12700">
+            <a:solidFill>
+              <a:srgbClr val="8EDBD4"/>
+            </a:solidFill>
+          </a:ln>
+          <a:effectLst/>
+        </p:spPr>
+        <p:txBody>
+          <a:bodyPr rtlCol="0" anchor="ctr"/>
+          <a:lstStyle/>
+          <a:p>
+            <a:pPr algn="ctr"/>
+          </a:p>
+        </p:txBody>
+      </p:sp>
+      <p:sp>
+        <p:nvSpPr>
+          <p:cNvPr id="60" name="C1-E08 ellipse 58" descr="sci-ppt:o058"/>
+          <p:cNvSpPr/>
+          <p:nvPr/>
+        </p:nvSpPr>
+        <p:spPr>
+          <a:xfrm>
+            <a:off x="2842897" y="2478251"/>
+            <a:ext cx="146304" cy="146304"/>
+          </a:xfrm>
+          <a:prstGeom prst="ellipse">
+            <a:avLst/>
+          </a:prstGeom>
+          <a:solidFill>
+            <a:srgbClr val="8EDBD4"/>
+          </a:solidFill>
+          <a:ln w="12700">
+            <a:solidFill>
+              <a:srgbClr val="8EDBD4"/>
+            </a:solidFill>
+          </a:ln>
+          <a:effectLst/>
+        </p:spPr>
+        <p:txBody>
+          <a:bodyPr rtlCol="0" anchor="ctr"/>
+          <a:lstStyle/>
+          <a:p>
+            <a:pPr algn="ctr"/>
+          </a:p>
+        </p:txBody>
+      </p:sp>
+      <p:sp>
+        <p:nvSpPr>
+          <p:cNvPr id="61" name="C1-E08 ellipse 59" descr="sci-ppt:o059"/>
+          <p:cNvSpPr/>
+          <p:nvPr/>
+        </p:nvSpPr>
+        <p:spPr>
+          <a:xfrm>
+            <a:off x="2538761" y="2870311"/>
+            <a:ext cx="146304" cy="146304"/>
+          </a:xfrm>
+          <a:prstGeom prst="ellipse">
+            <a:avLst/>
+          </a:prstGeom>
+          <a:solidFill>
+            <a:srgbClr val="7FC8F8"/>
+          </a:solidFill>
+          <a:ln w="12700">
+            <a:solidFill>
+              <a:srgbClr val="7FC8F8"/>
+            </a:solidFill>
+          </a:ln>
+          <a:effectLst/>
+        </p:spPr>
+        <p:txBody>
+          <a:bodyPr rtlCol="0" anchor="ctr"/>
+          <a:lstStyle/>
+          <a:p>
+            <a:pPr algn="ctr"/>
+          </a:p>
+        </p:txBody>
+      </p:sp>
+      <p:sp>
+        <p:nvSpPr>
+          <p:cNvPr id="62" name="C1-E08 ellipse 60" descr="sci-ppt:o060"/>
+          <p:cNvSpPr/>
+          <p:nvPr/>
+        </p:nvSpPr>
+        <p:spPr>
+          <a:xfrm>
+            <a:off x="2090705" y="4084890"/>
+            <a:ext cx="146304" cy="146304"/>
+          </a:xfrm>
+          <a:prstGeom prst="ellipse">
+            <a:avLst/>
+          </a:prstGeom>
+          <a:solidFill>
+            <a:srgbClr val="7FC8F8"/>
+          </a:solidFill>
+          <a:ln w="12700">
+            <a:solidFill>
+              <a:srgbClr val="7FC8F8"/>
+            </a:solidFill>
+          </a:ln>
+          <a:effectLst/>
+        </p:spPr>
+        <p:txBody>
+          <a:bodyPr rtlCol="0" anchor="ctr"/>
+          <a:lstStyle/>
+          <a:p>
+            <a:pPr algn="ctr"/>
+          </a:p>
+        </p:txBody>
+      </p:sp>
+      <p:sp>
+        <p:nvSpPr>
+          <p:cNvPr id="63" name="C1-E08 ellipse 61" descr="sci-ppt:o061"/>
+          <p:cNvSpPr/>
+          <p:nvPr/>
+        </p:nvSpPr>
+        <p:spPr>
+          <a:xfrm>
+            <a:off x="2283125" y="2344533"/>
+            <a:ext cx="146304" cy="146304"/>
+          </a:xfrm>
+          <a:prstGeom prst="ellipse">
+            <a:avLst/>
+          </a:prstGeom>
+          <a:solidFill>
+            <a:srgbClr val="7FC8F8"/>
+          </a:solidFill>
+          <a:ln w="12700">
+            <a:solidFill>
+              <a:srgbClr val="7FC8F8"/>
+            </a:solidFill>
+          </a:ln>
+          <a:effectLst/>
+        </p:spPr>
+        <p:txBody>
+          <a:bodyPr rtlCol="0" anchor="ctr"/>
+          <a:lstStyle/>
+          <a:p>
+            <a:pPr algn="ctr"/>
+          </a:p>
+        </p:txBody>
+      </p:sp>
+      <p:sp>
+        <p:nvSpPr>
+          <p:cNvPr id="64" name="C1-E08 ellipse 62" descr="sci-ppt:o062"/>
+          <p:cNvSpPr/>
+          <p:nvPr/>
+        </p:nvSpPr>
+        <p:spPr>
+          <a:xfrm>
+            <a:off x="2620935" y="3097588"/>
+            <a:ext cx="146304" cy="146304"/>
+          </a:xfrm>
+          <a:prstGeom prst="ellipse">
+            <a:avLst/>
+          </a:prstGeom>
+          <a:solidFill>
+            <a:srgbClr val="7FC8F8"/>
+          </a:solidFill>
+          <a:ln w="12700">
+            <a:solidFill>
+              <a:srgbClr val="7FC8F8"/>
+            </a:solidFill>
+          </a:ln>
+          <a:effectLst/>
+        </p:spPr>
+        <p:txBody>
+          <a:bodyPr rtlCol="0" anchor="ctr"/>
+          <a:lstStyle/>
+          <a:p>
+            <a:pPr algn="ctr"/>
+          </a:p>
+        </p:txBody>
+      </p:sp>
+      <p:sp>
+        <p:nvSpPr>
+          <p:cNvPr id="65" name="C1-E08 ellipse 63" descr="sci-ppt:o063"/>
+          <p:cNvSpPr/>
+          <p:nvPr/>
+        </p:nvSpPr>
+        <p:spPr>
+          <a:xfrm>
+            <a:off x="1716559" y="2779577"/>
+            <a:ext cx="146304" cy="146304"/>
+          </a:xfrm>
+          <a:prstGeom prst="ellipse">
+            <a:avLst/>
+          </a:prstGeom>
+          <a:solidFill>
+            <a:srgbClr val="7FC8F8"/>
+          </a:solidFill>
+          <a:ln w="12700">
+            <a:solidFill>
+              <a:srgbClr val="7FC8F8"/>
+            </a:solidFill>
+          </a:ln>
+          <a:effectLst/>
+        </p:spPr>
+        <p:txBody>
+          <a:bodyPr rtlCol="0" anchor="ctr"/>
+          <a:lstStyle/>
+          <a:p>
+            <a:pPr algn="ctr"/>
+          </a:p>
+        </p:txBody>
+      </p:sp>
+      <p:sp>
+        <p:nvSpPr>
+          <p:cNvPr id="66" name="C1-E08 ellipse 64" descr="sci-ppt:o064"/>
+          <p:cNvSpPr/>
+          <p:nvPr/>
+        </p:nvSpPr>
+        <p:spPr>
+          <a:xfrm>
+            <a:off x="1952619" y="3294259"/>
+            <a:ext cx="146304" cy="146304"/>
+          </a:xfrm>
+          <a:prstGeom prst="ellipse">
+            <a:avLst/>
+          </a:prstGeom>
+          <a:solidFill>
+            <a:srgbClr val="F2B880"/>
+          </a:solidFill>
+          <a:ln w="12700">
+            <a:solidFill>
+              <a:srgbClr val="F2B880"/>
+            </a:solidFill>
+          </a:ln>
+          <a:effectLst/>
+        </p:spPr>
+        <p:txBody>
+          <a:bodyPr rtlCol="0" anchor="ctr"/>
+          <a:lstStyle/>
+          <a:p>
+            <a:pPr algn="ctr"/>
+          </a:p>
+        </p:txBody>
+      </p:sp>
+      <p:sp>
+        <p:nvSpPr>
+          <p:cNvPr id="67" name="C1-E08 ellipse 65" descr="sci-ppt:o065"/>
+          <p:cNvSpPr/>
+          <p:nvPr/>
+        </p:nvSpPr>
+        <p:spPr>
+          <a:xfrm>
+            <a:off x="2085804" y="3362518"/>
+            <a:ext cx="146304" cy="146304"/>
+          </a:xfrm>
+          <a:prstGeom prst="ellipse">
+            <a:avLst/>
+          </a:prstGeom>
+          <a:solidFill>
+            <a:srgbClr val="F2B880"/>
+          </a:solidFill>
+          <a:ln w="12700">
+            <a:solidFill>
+              <a:srgbClr val="F2B880"/>
+            </a:solidFill>
+          </a:ln>
+          <a:effectLst/>
+        </p:spPr>
+        <p:txBody>
+          <a:bodyPr rtlCol="0" anchor="ctr"/>
+          <a:lstStyle/>
+          <a:p>
+            <a:pPr algn="ctr"/>
+          </a:p>
+        </p:txBody>
+      </p:sp>
+      <p:sp>
+        <p:nvSpPr>
+          <p:cNvPr id="68" name="C1-E08 ellipse 66" descr="sci-ppt:o066"/>
+          <p:cNvSpPr/>
+          <p:nvPr/>
+        </p:nvSpPr>
+        <p:spPr>
+          <a:xfrm>
+            <a:off x="3291374" y="2916616"/>
+            <a:ext cx="146304" cy="146304"/>
+          </a:xfrm>
+          <a:prstGeom prst="ellipse">
+            <a:avLst/>
+          </a:prstGeom>
+          <a:solidFill>
+            <a:srgbClr val="F2B880"/>
+          </a:solidFill>
+          <a:ln w="12700">
+            <a:solidFill>
+              <a:srgbClr val="F2B880"/>
+            </a:solidFill>
+          </a:ln>
+          <a:effectLst/>
+        </p:spPr>
+        <p:txBody>
+          <a:bodyPr rtlCol="0" anchor="ctr"/>
+          <a:lstStyle/>
+          <a:p>
+            <a:pPr algn="ctr"/>
+          </a:p>
+        </p:txBody>
+      </p:sp>
+      <p:sp>
+        <p:nvSpPr>
+          <p:cNvPr id="69" name="C1-E08 text 67" descr="sci-ppt:o067"/>
+          <p:cNvSpPr txBox="1"/>
+          <p:nvPr/>
+        </p:nvSpPr>
+        <p:spPr>
+          <a:xfrm>
+            <a:off x="502920" y="4892040"/>
+            <a:ext cx="3931920" cy="626745"/>
+          </a:xfrm>
+          <a:prstGeom prst="rect">
+            <a:avLst/>
+          </a:prstGeom>
+          <a:noFill/>
+          <a:effectLst/>
+        </p:spPr>
+        <p:txBody>
+          <a:bodyPr wrap="none" lIns="18288" rIns="18288" tIns="18288" bIns="18288" anchor="t">
+            <a:spAutoFit/>
+          </a:bodyPr>
+          <a:lstStyle/>
+          <a:p>
+            <a:pPr algn="l">
+              <a:spcAft>
+                <a:spcPts val="0"/>
+              </a:spcAft>
+            </a:pPr>
+            <a:r>
+              <a:rPr sz="1250" b="0" i="0">
                 <a:solidFill>
                   <a:srgbClr val="E7F0F3"/>
                 </a:solidFill>
                 <a:latin typeface="Arial"/>
               </a:rPr>
-              <a:t>pb</a:t>
-            </a:r>
-          </a:p>
-        </p:txBody>
-      </p:sp>
-      <p:sp>
-        <p:nvSpPr>
-          <p:cNvPr id="10" name="text9" descr="sci-ppt:C1-E08-009"/>
-          <p:cNvSpPr txBox="1"/>
-          <p:nvPr/>
-        </p:nvSpPr>
-        <p:spPr>
-          <a:xfrm>
-            <a:off x="365760" y="5266944"/>
-            <a:ext cx="5547360" cy="321259"/>
-          </a:xfrm>
-          <a:prstGeom prst="rect">
-            <a:avLst/>
-          </a:prstGeom>
-          <a:noFill/>
-          <a:effectLst/>
-        </p:spPr>
-        <p:txBody>
-          <a:bodyPr wrap="none" lIns="27432" rIns="27432" tIns="18288" bIns="18288" anchor="ctr">
-            <a:spAutoFit/>
-          </a:bodyPr>
-          <a:lstStyle/>
+              <a:t>PFC vapor, water vapor and permanent gas fill</a:t>
+            </a:r>
+          </a:p>
           <a:p>
             <a:pPr algn="l">
               <a:spcAft>
@@ -3429,39 +5397,15 @@
               </a:spcAft>
             </a:pPr>
             <a:r>
-              <a:rPr sz="1632" b="0" i="0">
+              <a:rPr sz="1250" b="0" i="0">
                 <a:solidFill>
                   <a:srgbClr val="E7F0F3"/>
                 </a:solidFill>
                 <a:latin typeface="Arial"/>
               </a:rPr>
-              <a:t>pv,w</a:t>
-            </a:r>
-          </a:p>
-        </p:txBody>
-      </p:sp>
-      <p:sp>
-        <p:nvSpPr>
-          <p:cNvPr id="11" name="text10" descr="sci-ppt:C1-E08-010"/>
-          <p:cNvSpPr txBox="1"/>
-          <p:nvPr/>
-        </p:nvSpPr>
-        <p:spPr>
-          <a:xfrm>
-            <a:off x="365760" y="5559552"/>
-            <a:ext cx="5547360" cy="321259"/>
-          </a:xfrm>
-          <a:prstGeom prst="rect">
-            <a:avLst/>
-          </a:prstGeom>
-          <a:noFill/>
-          <a:effectLst/>
-        </p:spPr>
-        <p:txBody>
-          <a:bodyPr wrap="none" lIns="27432" rIns="27432" tIns="18288" bIns="18288" anchor="ctr">
-            <a:spAutoFit/>
-          </a:bodyPr>
-          <a:lstStyle/>
+              <a:t>one volume at one temperature; their pressures</a:t>
+            </a:r>
+          </a:p>
           <a:p>
             <a:pPr algn="l">
               <a:spcAft>
@@ -3469,27 +5413,27 @@
               </a:spcAft>
             </a:pPr>
             <a:r>
-              <a:rPr sz="1632" b="0" i="0">
+              <a:rPr sz="1250" b="0" i="0">
                 <a:solidFill>
                   <a:srgbClr val="E7F0F3"/>
                 </a:solidFill>
                 <a:latin typeface="Arial"/>
               </a:rPr>
-              <a:t>Finite PFC liquid inventory</a:t>
-            </a:r>
-          </a:p>
-        </p:txBody>
-      </p:sp>
-      <p:sp>
-        <p:nvSpPr>
-          <p:cNvPr id="12" name="text11" descr="sci-ppt:C1-E08-011"/>
+              <a:t>add.</a:t>
+            </a:r>
+          </a:p>
+        </p:txBody>
+      </p:sp>
+      <p:sp>
+        <p:nvSpPr>
+          <p:cNvPr id="70" name="C1-E08 text 68" descr="sci-ppt:o068"/>
           <p:cNvSpPr txBox="1"/>
           <p:nvPr/>
         </p:nvSpPr>
         <p:spPr>
           <a:xfrm>
-            <a:off x="6156960" y="4974336"/>
-            <a:ext cx="5547360" cy="321259"/>
+            <a:off x="320040" y="6510528"/>
+            <a:ext cx="11521440" cy="200660"/>
           </a:xfrm>
           <a:prstGeom prst="rect">
             <a:avLst/>
@@ -3498,7 +5442,7 @@
           <a:effectLst/>
         </p:spPr>
         <p:txBody>
-          <a:bodyPr wrap="none" lIns="27432" rIns="27432" tIns="18288" bIns="18288" anchor="ctr">
+          <a:bodyPr wrap="none" lIns="18288" rIns="18288" tIns="18288" bIns="18288" anchor="t">
             <a:spAutoFit/>
           </a:bodyPr>
           <a:lstStyle/>
@@ -3509,133 +5453,13 @@
               </a:spcAft>
             </a:pPr>
             <a:r>
-              <a:rPr sz="1632" b="0" i="0">
-                <a:solidFill>
-                  <a:srgbClr val="E7F0F3"/>
-                </a:solidFill>
-                <a:latin typeface="Arial"/>
-              </a:rPr>
-              <a:t>pv,PFC</a:t>
-            </a:r>
-          </a:p>
-        </p:txBody>
-      </p:sp>
-      <p:sp>
-        <p:nvSpPr>
-          <p:cNvPr id="13" name="text12" descr="sci-ppt:C1-E08-012"/>
-          <p:cNvSpPr txBox="1"/>
-          <p:nvPr/>
-        </p:nvSpPr>
-        <p:spPr>
-          <a:xfrm>
-            <a:off x="6156960" y="5266944"/>
-            <a:ext cx="5547360" cy="321259"/>
-          </a:xfrm>
-          <a:prstGeom prst="rect">
-            <a:avLst/>
-          </a:prstGeom>
-          <a:noFill/>
-          <a:effectLst/>
-        </p:spPr>
-        <p:txBody>
-          <a:bodyPr wrap="none" lIns="27432" rIns="27432" tIns="18288" bIns="18288" anchor="ctr">
-            <a:spAutoFit/>
-          </a:bodyPr>
-          <a:lstStyle/>
-          <a:p>
-            <a:pPr algn="l">
-              <a:spcAft>
-                <a:spcPts val="0"/>
-              </a:spcAft>
-            </a:pPr>
-            <a:r>
-              <a:rPr sz="1632" b="0" i="0">
-                <a:solidFill>
-                  <a:srgbClr val="E7F0F3"/>
-                </a:solidFill>
-                <a:latin typeface="Arial"/>
-              </a:rPr>
-              <a:t>pg</a:t>
-            </a:r>
-          </a:p>
-        </p:txBody>
-      </p:sp>
-      <p:sp>
-        <p:nvSpPr>
-          <p:cNvPr id="14" name="text13" descr="sci-ppt:C1-E08-013"/>
-          <p:cNvSpPr txBox="1"/>
-          <p:nvPr/>
-        </p:nvSpPr>
-        <p:spPr>
-          <a:xfrm>
-            <a:off x="365760" y="6278880"/>
-            <a:ext cx="11277600" cy="302361"/>
-          </a:xfrm>
-          <a:prstGeom prst="rect">
-            <a:avLst/>
-          </a:prstGeom>
-          <a:noFill/>
-          <a:effectLst/>
-        </p:spPr>
-        <p:txBody>
-          <a:bodyPr wrap="none" lIns="27432" rIns="27432" tIns="18288" bIns="18288" anchor="ctr">
-            <a:spAutoFit/>
-          </a:bodyPr>
-          <a:lstStyle/>
-          <a:p>
-            <a:pPr algn="l">
-              <a:spcAft>
-                <a:spcPts val="0"/>
-              </a:spcAft>
-            </a:pPr>
-            <a:r>
-              <a:rPr sz="1536" b="0" i="0">
+              <a:rPr sz="1000" b="0" i="0">
                 <a:solidFill>
                   <a:srgbClr val="B4C7D2"/>
                 </a:solidFill>
                 <a:latin typeface="Arial"/>
               </a:rPr>
-              <a:t>Partial pressures need mass and energy histories</a:t>
-            </a:r>
-          </a:p>
-        </p:txBody>
-      </p:sp>
-      <p:sp>
-        <p:nvSpPr>
-          <p:cNvPr id="15" name="text14" descr="sci-ppt:C1-E08-014"/>
-          <p:cNvSpPr txBox="1"/>
-          <p:nvPr/>
-        </p:nvSpPr>
-        <p:spPr>
-          <a:xfrm>
-            <a:off x="365760" y="6571488"/>
-            <a:ext cx="11277600" cy="302361"/>
-          </a:xfrm>
-          <a:prstGeom prst="rect">
-            <a:avLst/>
-          </a:prstGeom>
-          <a:noFill/>
-          <a:effectLst/>
-        </p:spPr>
-        <p:txBody>
-          <a:bodyPr wrap="none" lIns="27432" rIns="27432" tIns="18288" bIns="18288" anchor="ctr">
-            <a:spAutoFit/>
-          </a:bodyPr>
-          <a:lstStyle/>
-          <a:p>
-            <a:pPr algn="l">
-              <a:spcAft>
-                <a:spcPts val="0"/>
-              </a:spcAft>
-            </a:pPr>
-            <a:r>
-              <a:rPr sz="1536" b="0" i="0">
-                <a:solidFill>
-                  <a:srgbClr val="B4C7D2"/>
-                </a:solidFill>
-                <a:latin typeface="Arial"/>
-              </a:rPr>
-              <a:t>No fixed-mass gas law is automatically a vaporization law</a:t>
+              <a:t>The radius equation needs p_b from the contents (a thermodynamic closure), not from R alone.</a:t>
             </a:r>
           </a:p>
         </p:txBody>
